--- a/startup_success_prediction.pptx
+++ b/startup_success_prediction.pptx
@@ -143,7 +143,7 @@
               </a:defRPr>
             </a:pPr>
             <a:r>
-              <a:rPr sz="900" b="0" i="0" u="none" strike="noStrike">
+              <a:rPr lang="en-US" sz="900" b="0" i="0" u="none" strike="noStrike">
                 <a:solidFill>
                   <a:srgbClr val="8B949E"/>
                 </a:solidFill>
@@ -1790,7 +1790,7 @@
       </p:sp>
       <p:sp>
         <p:nvSpPr>
-          <p:cNvPr id="4" name="Shape 2"/>
+          <p:cNvPr id="5" name="Text 3"/>
           <p:cNvSpPr/>
           <p:nvPr/>
         </p:nvSpPr>
@@ -1802,40 +1802,6 @@
           <a:prstGeom prst="rect">
             <a:avLst/>
           </a:prstGeom>
-          <a:solidFill>
-            <a:srgbClr val="58A6FF">
-              <a:alpha val="15000"/>
-            </a:srgbClr>
-          </a:solidFill>
-          <a:ln w="12700">
-            <a:solidFill>
-              <a:srgbClr val="58A6FF"/>
-            </a:solidFill>
-            <a:prstDash val="solid"/>
-          </a:ln>
-        </p:spPr>
-        <p:txBody>
-          <a:bodyPr/>
-          <a:lstStyle/>
-          <a:p>
-            <a:endParaRPr lang="en-US"/>
-          </a:p>
-        </p:txBody>
-      </p:sp>
-      <p:sp>
-        <p:nvSpPr>
-          <p:cNvPr id="5" name="Text 3"/>
-          <p:cNvSpPr/>
-          <p:nvPr/>
-        </p:nvSpPr>
-        <p:spPr>
-          <a:xfrm>
-            <a:off x="457200" y="292608"/>
-            <a:ext cx="1737360" cy="256032"/>
-          </a:xfrm>
-          <a:prstGeom prst="rect">
-            <a:avLst/>
-          </a:prstGeom>
           <a:noFill/>
           <a:ln/>
         </p:spPr>
@@ -1846,14 +1812,6 @@
             <a:pPr marL="0" indent="0" algn="ctr">
               <a:buNone/>
             </a:pPr>
-            <a:r>
-              <a:rPr lang="en-US" sz="800" b="1" kern="0" spc="150" dirty="0">
-                <a:solidFill>
-                  <a:srgbClr val="58A6FF"/>
-                </a:solidFill>
-              </a:rPr>
-              <a:t>PBL 2026  ·  CSE  ·  MUJ</a:t>
-            </a:r>
             <a:endParaRPr lang="en-US" sz="800" dirty="0"/>
           </a:p>
         </p:txBody>
@@ -2448,42 +2406,6 @@
               <a:t>OUTCOME CLASSES</a:t>
             </a:r>
             <a:endParaRPr lang="en-US" sz="700" dirty="0"/>
-          </a:p>
-        </p:txBody>
-      </p:sp>
-      <p:sp>
-        <p:nvSpPr>
-          <p:cNvPr id="22" name="Text 20"/>
-          <p:cNvSpPr/>
-          <p:nvPr/>
-        </p:nvSpPr>
-        <p:spPr>
-          <a:xfrm>
-            <a:off x="457200" y="4754880"/>
-            <a:ext cx="8229600" cy="201168"/>
-          </a:xfrm>
-          <a:prstGeom prst="rect">
-            <a:avLst/>
-          </a:prstGeom>
-          <a:noFill/>
-          <a:ln/>
-        </p:spPr>
-        <p:txBody>
-          <a:bodyPr wrap="square" lIns="0" tIns="0" rIns="0" bIns="0" rtlCol="0" anchor="ctr"/>
-          <a:lstStyle/>
-          <a:p>
-            <a:pPr marL="0" indent="0" algn="l">
-              <a:buNone/>
-            </a:pPr>
-            <a:r>
-              <a:rPr lang="en-US" sz="850" dirty="0">
-                <a:solidFill>
-                  <a:srgbClr val="8B949E"/>
-                </a:solidFill>
-              </a:rPr>
-              <a:t>Laksh Arora  ·  Reg: 2427030030  ·  Guide: Dr. Amit Kumar Gupta  ·  Manipal University Jaipur</a:t>
-            </a:r>
-            <a:endParaRPr lang="en-US" sz="850" dirty="0"/>
           </a:p>
         </p:txBody>
       </p:sp>
@@ -3149,14 +3071,6 @@
             <a:pPr marL="0" indent="0" algn="ctr">
               <a:buNone/>
             </a:pPr>
-            <a:r>
-              <a:rPr lang="en-US" sz="900" dirty="0">
-                <a:solidFill>
-                  <a:srgbClr val="8B949E"/>
-                </a:solidFill>
-              </a:rPr>
-              <a:t>Laksh Arora  ·  Reg: 2427030030  ·  Guide: Dr. Amit Kumar Gupta  ·  Manipal University Jaipur  ·  PBL 2026</a:t>
-            </a:r>
             <a:endParaRPr lang="en-US" sz="900" dirty="0"/>
           </a:p>
         </p:txBody>
@@ -3185,14 +3099,6 @@
             <a:pPr marL="0" indent="0" algn="ctr">
               <a:buNone/>
             </a:pPr>
-            <a:r>
-              <a:rPr lang="en-US" sz="2200" b="1" dirty="0">
-                <a:solidFill>
-                  <a:srgbClr val="58A6FF"/>
-                </a:solidFill>
-              </a:rPr>
-              <a:t>Thank you</a:t>
-            </a:r>
             <a:endParaRPr lang="en-US" sz="2200" dirty="0"/>
           </a:p>
         </p:txBody>
@@ -3376,42 +3282,6 @@
       </p:sp>
       <p:sp>
         <p:nvSpPr>
-          <p:cNvPr id="6" name="Text 4"/>
-          <p:cNvSpPr/>
-          <p:nvPr/>
-        </p:nvSpPr>
-        <p:spPr>
-          <a:xfrm>
-            <a:off x="365760" y="4919472"/>
-            <a:ext cx="8412480" cy="182880"/>
-          </a:xfrm>
-          <a:prstGeom prst="rect">
-            <a:avLst/>
-          </a:prstGeom>
-          <a:noFill/>
-          <a:ln/>
-        </p:spPr>
-        <p:txBody>
-          <a:bodyPr wrap="square" lIns="0" tIns="0" rIns="0" bIns="0" rtlCol="0" anchor="ctr"/>
-          <a:lstStyle/>
-          <a:p>
-            <a:pPr marL="0" indent="0" algn="l">
-              <a:buNone/>
-            </a:pPr>
-            <a:r>
-              <a:rPr lang="en-US" sz="750" dirty="0">
-                <a:solidFill>
-                  <a:srgbClr val="8B949E"/>
-                </a:solidFill>
-              </a:rPr>
-              <a:t>Laksh Arora  ·  Reg: 2427030030  ·  Manipal University Jaipur  ·  PBL 2026</a:t>
-            </a:r>
-            <a:endParaRPr lang="en-US" sz="750" dirty="0"/>
-          </a:p>
-        </p:txBody>
-      </p:sp>
-      <p:sp>
-        <p:nvSpPr>
           <p:cNvPr id="7" name="Shape 5"/>
           <p:cNvSpPr/>
           <p:nvPr/>
@@ -4204,42 +4074,6 @@
       </p:sp>
       <p:sp>
         <p:nvSpPr>
-          <p:cNvPr id="5" name="Text 3"/>
-          <p:cNvSpPr/>
-          <p:nvPr/>
-        </p:nvSpPr>
-        <p:spPr>
-          <a:xfrm>
-            <a:off x="365760" y="4919472"/>
-            <a:ext cx="8412480" cy="182880"/>
-          </a:xfrm>
-          <a:prstGeom prst="rect">
-            <a:avLst/>
-          </a:prstGeom>
-          <a:noFill/>
-          <a:ln/>
-        </p:spPr>
-        <p:txBody>
-          <a:bodyPr wrap="square" lIns="0" tIns="0" rIns="0" bIns="0" rtlCol="0" anchor="ctr"/>
-          <a:lstStyle/>
-          <a:p>
-            <a:pPr marL="0" indent="0" algn="l">
-              <a:buNone/>
-            </a:pPr>
-            <a:r>
-              <a:rPr lang="en-US" sz="750" dirty="0">
-                <a:solidFill>
-                  <a:srgbClr val="8B949E"/>
-                </a:solidFill>
-              </a:rPr>
-              <a:t>Laksh Arora  ·  Reg: 2427030030  ·  Manipal University Jaipur  ·  PBL 2026</a:t>
-            </a:r>
-            <a:endParaRPr lang="en-US" sz="750" dirty="0"/>
-          </a:p>
-        </p:txBody>
-      </p:sp>
-      <p:sp>
-        <p:nvSpPr>
           <p:cNvPr id="6" name="Text 4"/>
           <p:cNvSpPr/>
           <p:nvPr/>
@@ -6361,42 +6195,6 @@
       </p:sp>
       <p:sp>
         <p:nvSpPr>
-          <p:cNvPr id="6" name="Text 4"/>
-          <p:cNvSpPr/>
-          <p:nvPr/>
-        </p:nvSpPr>
-        <p:spPr>
-          <a:xfrm>
-            <a:off x="365760" y="4919472"/>
-            <a:ext cx="8412480" cy="182880"/>
-          </a:xfrm>
-          <a:prstGeom prst="rect">
-            <a:avLst/>
-          </a:prstGeom>
-          <a:noFill/>
-          <a:ln/>
-        </p:spPr>
-        <p:txBody>
-          <a:bodyPr wrap="square" lIns="0" tIns="0" rIns="0" bIns="0" rtlCol="0" anchor="ctr"/>
-          <a:lstStyle/>
-          <a:p>
-            <a:pPr marL="0" indent="0" algn="l">
-              <a:buNone/>
-            </a:pPr>
-            <a:r>
-              <a:rPr lang="en-US" sz="750" dirty="0">
-                <a:solidFill>
-                  <a:srgbClr val="8B949E"/>
-                </a:solidFill>
-              </a:rPr>
-              <a:t>Laksh Arora  ·  Reg: 2427030030  ·  Manipal University Jaipur  ·  PBL 2026</a:t>
-            </a:r>
-            <a:endParaRPr lang="en-US" sz="750" dirty="0"/>
-          </a:p>
-        </p:txBody>
-      </p:sp>
-      <p:sp>
-        <p:nvSpPr>
           <p:cNvPr id="7" name="Shape 5"/>
           <p:cNvSpPr/>
           <p:nvPr/>
@@ -7758,42 +7556,6 @@
       </p:sp>
       <p:sp>
         <p:nvSpPr>
-          <p:cNvPr id="6" name="Text 4"/>
-          <p:cNvSpPr/>
-          <p:nvPr/>
-        </p:nvSpPr>
-        <p:spPr>
-          <a:xfrm>
-            <a:off x="365760" y="4919472"/>
-            <a:ext cx="8412480" cy="182880"/>
-          </a:xfrm>
-          <a:prstGeom prst="rect">
-            <a:avLst/>
-          </a:prstGeom>
-          <a:noFill/>
-          <a:ln/>
-        </p:spPr>
-        <p:txBody>
-          <a:bodyPr wrap="square" lIns="0" tIns="0" rIns="0" bIns="0" rtlCol="0" anchor="ctr"/>
-          <a:lstStyle/>
-          <a:p>
-            <a:pPr marL="0" indent="0" algn="l">
-              <a:buNone/>
-            </a:pPr>
-            <a:r>
-              <a:rPr lang="en-US" sz="750" dirty="0">
-                <a:solidFill>
-                  <a:srgbClr val="8B949E"/>
-                </a:solidFill>
-              </a:rPr>
-              <a:t>Laksh Arora  ·  Reg: 2427030030  ·  Manipal University Jaipur  ·  PBL 2026</a:t>
-            </a:r>
-            <a:endParaRPr lang="en-US" sz="750" dirty="0"/>
-          </a:p>
-        </p:txBody>
-      </p:sp>
-      <p:sp>
-        <p:nvSpPr>
           <p:cNvPr id="7" name="Shape 5"/>
           <p:cNvSpPr/>
           <p:nvPr/>
@@ -8548,42 +8310,6 @@
           <a:lstStyle/>
           <a:p>
             <a:endParaRPr lang="en-US"/>
-          </a:p>
-        </p:txBody>
-      </p:sp>
-      <p:sp>
-        <p:nvSpPr>
-          <p:cNvPr id="6" name="Text 4"/>
-          <p:cNvSpPr/>
-          <p:nvPr/>
-        </p:nvSpPr>
-        <p:spPr>
-          <a:xfrm>
-            <a:off x="365760" y="4919472"/>
-            <a:ext cx="8412480" cy="182880"/>
-          </a:xfrm>
-          <a:prstGeom prst="rect">
-            <a:avLst/>
-          </a:prstGeom>
-          <a:noFill/>
-          <a:ln/>
-        </p:spPr>
-        <p:txBody>
-          <a:bodyPr wrap="square" lIns="0" tIns="0" rIns="0" bIns="0" rtlCol="0" anchor="ctr"/>
-          <a:lstStyle/>
-          <a:p>
-            <a:pPr marL="0" indent="0" algn="l">
-              <a:buNone/>
-            </a:pPr>
-            <a:r>
-              <a:rPr lang="en-US" sz="750" dirty="0">
-                <a:solidFill>
-                  <a:srgbClr val="8B949E"/>
-                </a:solidFill>
-              </a:rPr>
-              <a:t>Laksh Arora  ·  Reg: 2427030030  ·  Manipal University Jaipur  ·  PBL 2026</a:t>
-            </a:r>
-            <a:endParaRPr lang="en-US" sz="750" dirty="0"/>
           </a:p>
         </p:txBody>
       </p:sp>
@@ -10699,42 +10425,6 @@
       </p:sp>
       <p:sp>
         <p:nvSpPr>
-          <p:cNvPr id="6" name="Text 4"/>
-          <p:cNvSpPr/>
-          <p:nvPr/>
-        </p:nvSpPr>
-        <p:spPr>
-          <a:xfrm>
-            <a:off x="365760" y="4919472"/>
-            <a:ext cx="8412480" cy="182880"/>
-          </a:xfrm>
-          <a:prstGeom prst="rect">
-            <a:avLst/>
-          </a:prstGeom>
-          <a:noFill/>
-          <a:ln/>
-        </p:spPr>
-        <p:txBody>
-          <a:bodyPr wrap="square" lIns="0" tIns="0" rIns="0" bIns="0" rtlCol="0" anchor="ctr"/>
-          <a:lstStyle/>
-          <a:p>
-            <a:pPr marL="0" indent="0" algn="l">
-              <a:buNone/>
-            </a:pPr>
-            <a:r>
-              <a:rPr lang="en-US" sz="750" dirty="0">
-                <a:solidFill>
-                  <a:srgbClr val="8B949E"/>
-                </a:solidFill>
-              </a:rPr>
-              <a:t>Laksh Arora  ·  Reg: 2427030030  ·  Manipal University Jaipur  ·  PBL 2026</a:t>
-            </a:r>
-            <a:endParaRPr lang="en-US" sz="750" dirty="0"/>
-          </a:p>
-        </p:txBody>
-      </p:sp>
-      <p:sp>
-        <p:nvSpPr>
           <p:cNvPr id="7" name="Shape 5"/>
           <p:cNvSpPr/>
           <p:nvPr/>
@@ -12850,42 +12540,6 @@
       </p:sp>
       <p:sp>
         <p:nvSpPr>
-          <p:cNvPr id="6" name="Text 4"/>
-          <p:cNvSpPr/>
-          <p:nvPr/>
-        </p:nvSpPr>
-        <p:spPr>
-          <a:xfrm>
-            <a:off x="365760" y="4919472"/>
-            <a:ext cx="8412480" cy="182880"/>
-          </a:xfrm>
-          <a:prstGeom prst="rect">
-            <a:avLst/>
-          </a:prstGeom>
-          <a:noFill/>
-          <a:ln/>
-        </p:spPr>
-        <p:txBody>
-          <a:bodyPr wrap="square" lIns="0" tIns="0" rIns="0" bIns="0" rtlCol="0" anchor="ctr"/>
-          <a:lstStyle/>
-          <a:p>
-            <a:pPr marL="0" indent="0" algn="l">
-              <a:buNone/>
-            </a:pPr>
-            <a:r>
-              <a:rPr lang="en-US" sz="750" dirty="0">
-                <a:solidFill>
-                  <a:srgbClr val="8B949E"/>
-                </a:solidFill>
-              </a:rPr>
-              <a:t>Laksh Arora  ·  Reg: 2427030030  ·  Manipal University Jaipur  ·  PBL 2026</a:t>
-            </a:r>
-            <a:endParaRPr lang="en-US" sz="750" dirty="0"/>
-          </a:p>
-        </p:txBody>
-      </p:sp>
-      <p:sp>
-        <p:nvSpPr>
           <p:cNvPr id="7" name="Shape 5"/>
           <p:cNvSpPr/>
           <p:nvPr/>
@@ -13774,42 +13428,6 @@
           <a:lstStyle/>
           <a:p>
             <a:endParaRPr lang="en-US"/>
-          </a:p>
-        </p:txBody>
-      </p:sp>
-      <p:sp>
-        <p:nvSpPr>
-          <p:cNvPr id="6" name="Text 4"/>
-          <p:cNvSpPr/>
-          <p:nvPr/>
-        </p:nvSpPr>
-        <p:spPr>
-          <a:xfrm>
-            <a:off x="365760" y="4919472"/>
-            <a:ext cx="8412480" cy="182880"/>
-          </a:xfrm>
-          <a:prstGeom prst="rect">
-            <a:avLst/>
-          </a:prstGeom>
-          <a:noFill/>
-          <a:ln/>
-        </p:spPr>
-        <p:txBody>
-          <a:bodyPr wrap="square" lIns="0" tIns="0" rIns="0" bIns="0" rtlCol="0" anchor="ctr"/>
-          <a:lstStyle/>
-          <a:p>
-            <a:pPr marL="0" indent="0" algn="l">
-              <a:buNone/>
-            </a:pPr>
-            <a:r>
-              <a:rPr lang="en-US" sz="750" dirty="0">
-                <a:solidFill>
-                  <a:srgbClr val="8B949E"/>
-                </a:solidFill>
-              </a:rPr>
-              <a:t>Laksh Arora  ·  Reg: 2427030030  ·  Manipal University Jaipur  ·  PBL 2026</a:t>
-            </a:r>
-            <a:endParaRPr lang="en-US" sz="750" dirty="0"/>
           </a:p>
         </p:txBody>
       </p:sp>
